--- a/Phishing_Awareness_Training.pptx
+++ b/Phishing_Awareness_Training.pptx
@@ -119,6 +119,11 @@
       </a:defRPr>
     </a:lvl9pPr>
   </p:defaultTextStyle>
+  <p:extLst>
+    <p:ext uri="{EFAFB233-063F-42B5-8137-9DF3F51BA10A}">
+      <p15:sldGuideLst xmlns:p15="http://schemas.microsoft.com/office/powerpoint/2012/main"/>
+    </p:ext>
+  </p:extLst>
 </p:presentation>
 </file>
 
@@ -204,7 +209,7 @@
           <a:p>
             <a:fld id="{3D060B81-BE75-4BE1-9D91-65DFB2F2E26C}" type="datetimeFigureOut">
               <a:rPr lang="en-US" smtClean="0"/>
-              <a:t>7/13/2026</a:t>
+              <a:t>7/22/2026</a:t>
             </a:fld>
             <a:endParaRPr lang="en-US"/>
           </a:p>
@@ -1277,7 +1282,7 @@
           <a:p>
             <a:fld id="{E6E35E17-5A81-4CD0-A1C6-A42C6A7D6CCB}" type="datetimeFigureOut">
               <a:rPr lang="en-US" smtClean="0"/>
-              <a:t>7/13/2026</a:t>
+              <a:t>7/22/2026</a:t>
             </a:fld>
             <a:endParaRPr lang="en-US"/>
           </a:p>
@@ -1528,7 +1533,7 @@
           <a:p>
             <a:fld id="{E6E35E17-5A81-4CD0-A1C6-A42C6A7D6CCB}" type="datetimeFigureOut">
               <a:rPr lang="en-US" smtClean="0"/>
-              <a:t>7/13/2026</a:t>
+              <a:t>7/22/2026</a:t>
             </a:fld>
             <a:endParaRPr lang="en-US"/>
           </a:p>
@@ -1842,7 +1847,7 @@
           <a:p>
             <a:fld id="{E6E35E17-5A81-4CD0-A1C6-A42C6A7D6CCB}" type="datetimeFigureOut">
               <a:rPr lang="en-US" smtClean="0"/>
-              <a:t>7/13/2026</a:t>
+              <a:t>7/22/2026</a:t>
             </a:fld>
             <a:endParaRPr lang="en-US"/>
           </a:p>
@@ -2183,7 +2188,7 @@
           <a:p>
             <a:fld id="{E6E35E17-5A81-4CD0-A1C6-A42C6A7D6CCB}" type="datetimeFigureOut">
               <a:rPr lang="en-US" smtClean="0"/>
-              <a:t>7/13/2026</a:t>
+              <a:t>7/22/2026</a:t>
             </a:fld>
             <a:endParaRPr lang="en-US"/>
           </a:p>
@@ -2497,7 +2502,7 @@
           <a:p>
             <a:fld id="{E6E35E17-5A81-4CD0-A1C6-A42C6A7D6CCB}" type="datetimeFigureOut">
               <a:rPr lang="en-US" smtClean="0"/>
-              <a:t>7/13/2026</a:t>
+              <a:t>7/22/2026</a:t>
             </a:fld>
             <a:endParaRPr lang="en-US"/>
           </a:p>
@@ -2890,7 +2895,7 @@
           <a:p>
             <a:fld id="{E6E35E17-5A81-4CD0-A1C6-A42C6A7D6CCB}" type="datetimeFigureOut">
               <a:rPr lang="en-US" smtClean="0"/>
-              <a:t>7/13/2026</a:t>
+              <a:t>7/22/2026</a:t>
             </a:fld>
             <a:endParaRPr lang="en-US"/>
           </a:p>
@@ -3060,7 +3065,7 @@
           <a:p>
             <a:fld id="{E6E35E17-5A81-4CD0-A1C6-A42C6A7D6CCB}" type="datetimeFigureOut">
               <a:rPr lang="en-US" smtClean="0"/>
-              <a:t>7/13/2026</a:t>
+              <a:t>7/22/2026</a:t>
             </a:fld>
             <a:endParaRPr lang="en-US"/>
           </a:p>
@@ -3240,7 +3245,7 @@
           <a:p>
             <a:fld id="{E6E35E17-5A81-4CD0-A1C6-A42C6A7D6CCB}" type="datetimeFigureOut">
               <a:rPr lang="en-US" smtClean="0"/>
-              <a:t>7/13/2026</a:t>
+              <a:t>7/22/2026</a:t>
             </a:fld>
             <a:endParaRPr lang="en-US"/>
           </a:p>
@@ -3416,7 +3421,7 @@
           <a:p>
             <a:fld id="{E6E35E17-5A81-4CD0-A1C6-A42C6A7D6CCB}" type="datetimeFigureOut">
               <a:rPr lang="en-US" smtClean="0"/>
-              <a:t>7/13/2026</a:t>
+              <a:t>7/22/2026</a:t>
             </a:fld>
             <a:endParaRPr lang="en-US"/>
           </a:p>
@@ -3663,7 +3668,7 @@
           <a:p>
             <a:fld id="{E6E35E17-5A81-4CD0-A1C6-A42C6A7D6CCB}" type="datetimeFigureOut">
               <a:rPr lang="en-US" smtClean="0"/>
-              <a:t>7/13/2026</a:t>
+              <a:t>7/22/2026</a:t>
             </a:fld>
             <a:endParaRPr lang="en-US"/>
           </a:p>
@@ -3895,7 +3900,7 @@
           <a:p>
             <a:fld id="{E6E35E17-5A81-4CD0-A1C6-A42C6A7D6CCB}" type="datetimeFigureOut">
               <a:rPr lang="en-US" smtClean="0"/>
-              <a:t>7/13/2026</a:t>
+              <a:t>7/22/2026</a:t>
             </a:fld>
             <a:endParaRPr lang="en-US"/>
           </a:p>
@@ -4269,7 +4274,7 @@
           <a:p>
             <a:fld id="{E6E35E17-5A81-4CD0-A1C6-A42C6A7D6CCB}" type="datetimeFigureOut">
               <a:rPr lang="en-US" smtClean="0"/>
-              <a:t>7/13/2026</a:t>
+              <a:t>7/22/2026</a:t>
             </a:fld>
             <a:endParaRPr lang="en-US"/>
           </a:p>
@@ -4392,7 +4397,7 @@
           <a:p>
             <a:fld id="{E6E35E17-5A81-4CD0-A1C6-A42C6A7D6CCB}" type="datetimeFigureOut">
               <a:rPr lang="en-US" smtClean="0"/>
-              <a:t>7/13/2026</a:t>
+              <a:t>7/22/2026</a:t>
             </a:fld>
             <a:endParaRPr lang="en-US"/>
           </a:p>
@@ -4487,7 +4492,7 @@
           <a:p>
             <a:fld id="{E6E35E17-5A81-4CD0-A1C6-A42C6A7D6CCB}" type="datetimeFigureOut">
               <a:rPr lang="en-US" smtClean="0"/>
-              <a:t>7/13/2026</a:t>
+              <a:t>7/22/2026</a:t>
             </a:fld>
             <a:endParaRPr lang="en-US"/>
           </a:p>
@@ -4742,7 +4747,7 @@
           <a:p>
             <a:fld id="{E6E35E17-5A81-4CD0-A1C6-A42C6A7D6CCB}" type="datetimeFigureOut">
               <a:rPr lang="en-US" smtClean="0"/>
-              <a:t>7/13/2026</a:t>
+              <a:t>7/22/2026</a:t>
             </a:fld>
             <a:endParaRPr lang="en-US"/>
           </a:p>
@@ -5005,7 +5010,7 @@
           <a:p>
             <a:fld id="{E6E35E17-5A81-4CD0-A1C6-A42C6A7D6CCB}" type="datetimeFigureOut">
               <a:rPr lang="en-US" smtClean="0"/>
-              <a:t>7/13/2026</a:t>
+              <a:t>7/22/2026</a:t>
             </a:fld>
             <a:endParaRPr lang="en-US"/>
           </a:p>
@@ -5748,7 +5753,7 @@
           <a:p>
             <a:fld id="{E6E35E17-5A81-4CD0-A1C6-A42C6A7D6CCB}" type="datetimeFigureOut">
               <a:rPr lang="en-US" smtClean="0"/>
-              <a:t>7/13/2026</a:t>
+              <a:t>7/22/2026</a:t>
             </a:fld>
             <a:endParaRPr lang="en-US"/>
           </a:p>
@@ -6393,16 +6398,23 @@
               <a:t>Miracle Godwin Ogbo</a:t>
             </a:r>
             <a:br>
+              <a:rPr lang="en-US" sz="3200" i="1" spc="-150" dirty="0">
+                <a:latin typeface="Times New Roman" panose="02020603050405020304" pitchFamily="18" charset="0"/>
+                <a:cs typeface="Times New Roman" panose="02020603050405020304" pitchFamily="18" charset="0"/>
+              </a:rPr>
+            </a:br>
+            <a:r>
+              <a:rPr lang="en-US" sz="2400" i="1" spc="-150" dirty="0">
+                <a:latin typeface="Times New Roman" panose="02020603050405020304" pitchFamily="18" charset="0"/>
+                <a:cs typeface="Times New Roman" panose="02020603050405020304" pitchFamily="18" charset="0"/>
+              </a:rPr>
+              <a:t>Penetration Tester</a:t>
+            </a:r>
+            <a:br>
               <a:rPr lang="en-US" sz="3200" i="1" dirty="0">
                 <a:solidFill>
                   <a:schemeClr val="tx1"/>
                 </a:solidFill>
-                <a:latin typeface="Times New Roman" panose="02020603050405020304" pitchFamily="18" charset="0"/>
-                <a:cs typeface="Times New Roman" panose="02020603050405020304" pitchFamily="18" charset="0"/>
-              </a:rPr>
-            </a:br>
-            <a:br>
-              <a:rPr lang="en-US" sz="3200" i="1" dirty="0">
                 <a:latin typeface="Times New Roman" panose="02020603050405020304" pitchFamily="18" charset="0"/>
                 <a:cs typeface="Times New Roman" panose="02020603050405020304" pitchFamily="18" charset="0"/>
               </a:rPr>
@@ -6482,13 +6494,13 @@
   <p:clrMapOvr>
     <a:masterClrMapping/>
   </p:clrMapOvr>
-  <mc:AlternateContent xmlns:mc="http://schemas.openxmlformats.org/markup-compatibility/2006">
-    <mc:Choice xmlns:p14="http://schemas.microsoft.com/office/powerpoint/2010/main" Requires="p14">
+  <mc:AlternateContent xmlns:mc="http://schemas.openxmlformats.org/markup-compatibility/2006" xmlns:p14="http://schemas.microsoft.com/office/powerpoint/2010/main">
+    <mc:Choice Requires="p14">
       <p:transition spd="med" p14:dur="700">
         <p:fade/>
       </p:transition>
     </mc:Choice>
-    <mc:Fallback>
+    <mc:Fallback xmlns="">
       <p:transition spd="med">
         <p:fade/>
       </p:transition>
@@ -7138,13 +7150,13 @@
   <p:clrMapOvr>
     <a:masterClrMapping/>
   </p:clrMapOvr>
-  <mc:AlternateContent xmlns:mc="http://schemas.openxmlformats.org/markup-compatibility/2006">
-    <mc:Choice xmlns:p14="http://schemas.microsoft.com/office/powerpoint/2010/main" Requires="p14">
+  <mc:AlternateContent xmlns:mc="http://schemas.openxmlformats.org/markup-compatibility/2006" xmlns:p14="http://schemas.microsoft.com/office/powerpoint/2010/main">
+    <mc:Choice Requires="p14">
       <p:transition spd="slow" p14:dur="1250">
         <p14:switch dir="r"/>
       </p:transition>
     </mc:Choice>
-    <mc:Fallback>
+    <mc:Fallback xmlns="">
       <p:transition spd="slow">
         <p:fade/>
       </p:transition>
@@ -7700,13 +7712,13 @@
   <p:clrMapOvr>
     <a:masterClrMapping/>
   </p:clrMapOvr>
-  <mc:AlternateContent xmlns:mc="http://schemas.openxmlformats.org/markup-compatibility/2006">
-    <mc:Choice xmlns:p15="http://schemas.microsoft.com/office/powerpoint/2012/main" Requires="p15">
+  <mc:AlternateContent xmlns:mc="http://schemas.openxmlformats.org/markup-compatibility/2006" xmlns:p15="http://schemas.microsoft.com/office/powerpoint/2012/main">
+    <mc:Choice Requires="p15">
       <p:transition xmlns:p14="http://schemas.microsoft.com/office/powerpoint/2010/main" spd="slow" p14:dur="1250">
         <p15:prstTrans prst="airplane"/>
       </p:transition>
     </mc:Choice>
-    <mc:Fallback>
+    <mc:Fallback xmlns="">
       <p:transition spd="slow">
         <p:fade/>
       </p:transition>
@@ -8105,13 +8117,13 @@
   <p:clrMapOvr>
     <a:masterClrMapping/>
   </p:clrMapOvr>
-  <mc:AlternateContent xmlns:mc="http://schemas.openxmlformats.org/markup-compatibility/2006">
-    <mc:Choice xmlns:p14="http://schemas.microsoft.com/office/powerpoint/2010/main" Requires="p14">
+  <mc:AlternateContent xmlns:mc="http://schemas.openxmlformats.org/markup-compatibility/2006" xmlns:p14="http://schemas.microsoft.com/office/powerpoint/2010/main">
+    <mc:Choice Requires="p14">
       <p:transition spd="slow" p14:dur="800">
         <p14:flythrough/>
       </p:transition>
     </mc:Choice>
-    <mc:Fallback>
+    <mc:Fallback xmlns="">
       <p:transition spd="slow">
         <p:fade/>
       </p:transition>
@@ -8407,7 +8419,7 @@
                 <a:latin typeface="Times New Roman" panose="02020603050405020304" pitchFamily="18" charset="0"/>
                 <a:cs typeface="Times New Roman" panose="02020603050405020304" pitchFamily="18" charset="0"/>
               </a:rPr>
-              <a:t>GitHub:</a:t>
+              <a:t>GitHub Portfolio:</a:t>
             </a:r>
           </a:p>
           <a:p>
@@ -8491,13 +8503,13 @@
   <p:clrMapOvr>
     <a:masterClrMapping/>
   </p:clrMapOvr>
-  <mc:AlternateContent xmlns:mc="http://schemas.openxmlformats.org/markup-compatibility/2006">
-    <mc:Choice xmlns:p14="http://schemas.microsoft.com/office/powerpoint/2010/main" Requires="p14">
+  <mc:AlternateContent xmlns:mc="http://schemas.openxmlformats.org/markup-compatibility/2006" xmlns:p14="http://schemas.microsoft.com/office/powerpoint/2010/main">
+    <mc:Choice Requires="p14">
       <p:transition spd="slow" p14:dur="800">
         <p14:flythrough/>
       </p:transition>
     </mc:Choice>
-    <mc:Fallback>
+    <mc:Fallback xmlns="">
       <p:transition spd="slow">
         <p:fade/>
       </p:transition>
@@ -8741,13 +8753,13 @@
   <p:clrMapOvr>
     <a:masterClrMapping/>
   </p:clrMapOvr>
-  <mc:AlternateContent xmlns:mc="http://schemas.openxmlformats.org/markup-compatibility/2006">
-    <mc:Choice xmlns:p14="http://schemas.microsoft.com/office/powerpoint/2010/main" Requires="p14">
+  <mc:AlternateContent xmlns:mc="http://schemas.openxmlformats.org/markup-compatibility/2006" xmlns:p14="http://schemas.microsoft.com/office/powerpoint/2010/main">
+    <mc:Choice Requires="p14">
       <p:transition spd="slow" p14:dur="1400">
         <p14:ripple/>
       </p:transition>
     </mc:Choice>
-    <mc:Fallback>
+    <mc:Fallback xmlns="">
       <p:transition spd="slow">
         <p:fade/>
       </p:transition>
@@ -8866,7 +8878,7 @@
                 <a:latin typeface="Times New Roman" panose="02020603050405020304" pitchFamily="18" charset="0"/>
                 <a:cs typeface="Times New Roman" panose="02020603050405020304" pitchFamily="18" charset="0"/>
               </a:rPr>
-              <a:t> is a cyberattack where attackers pretend to be trusted individuals or organizations to trick victims into revealing sensitive information.</a:t>
+              <a:t> is a cyberattack where attackers impersonate trusted individuals or organizations to trick victims into revealing sensitive information, including Personally Identifiable Information (PII) and Sensitive Personally Identifiable Information (SPII).</a:t>
             </a:r>
           </a:p>
           <a:p>
@@ -9038,7 +9050,7 @@
         </p:blipFill>
         <p:spPr>
           <a:xfrm rot="1296125">
-            <a:off x="3848762" y="2689545"/>
+            <a:off x="4409200" y="2890902"/>
             <a:ext cx="3082235" cy="2575201"/>
           </a:xfrm>
           <a:prstGeom prst="rect">
@@ -9056,13 +9068,13 @@
   <p:clrMapOvr>
     <a:masterClrMapping/>
   </p:clrMapOvr>
-  <mc:AlternateContent xmlns:mc="http://schemas.openxmlformats.org/markup-compatibility/2006">
-    <mc:Choice xmlns:p14="http://schemas.microsoft.com/office/powerpoint/2010/main" Requires="p14">
+  <mc:AlternateContent xmlns:mc="http://schemas.openxmlformats.org/markup-compatibility/2006" xmlns:p14="http://schemas.microsoft.com/office/powerpoint/2010/main">
+    <mc:Choice Requires="p14">
       <p:transition spd="slow" p14:dur="1600">
         <p14:conveyor dir="l"/>
       </p:transition>
     </mc:Choice>
-    <mc:Fallback>
+    <mc:Fallback xmlns="">
       <p:transition spd="slow">
         <p:fade/>
       </p:transition>
@@ -9444,13 +9456,13 @@
   <p:clrMapOvr>
     <a:masterClrMapping/>
   </p:clrMapOvr>
-  <mc:AlternateContent xmlns:mc="http://schemas.openxmlformats.org/markup-compatibility/2006">
-    <mc:Choice xmlns:p14="http://schemas.microsoft.com/office/powerpoint/2010/main" Requires="p14">
+  <mc:AlternateContent xmlns:mc="http://schemas.openxmlformats.org/markup-compatibility/2006" xmlns:p14="http://schemas.microsoft.com/office/powerpoint/2010/main">
+    <mc:Choice Requires="p14">
       <p:transition spd="slow" p14:dur="3900">
         <p14:glitter pattern="hexagon"/>
       </p:transition>
     </mc:Choice>
-    <mc:Fallback>
+    <mc:Fallback xmlns="">
       <p:transition spd="slow">
         <p:fade/>
       </p:transition>
@@ -10661,13 +10673,13 @@
   <p:clrMapOvr>
     <a:masterClrMapping/>
   </p:clrMapOvr>
-  <mc:AlternateContent xmlns:mc="http://schemas.openxmlformats.org/markup-compatibility/2006">
-    <mc:Choice xmlns:p15="http://schemas.microsoft.com/office/powerpoint/2012/main" Requires="p15">
+  <mc:AlternateContent xmlns:mc="http://schemas.openxmlformats.org/markup-compatibility/2006" xmlns:p15="http://schemas.microsoft.com/office/powerpoint/2012/main">
+    <mc:Choice Requires="p15">
       <p:transition xmlns:p14="http://schemas.microsoft.com/office/powerpoint/2010/main" spd="slow" p14:dur="2000">
         <p15:prstTrans prst="crush"/>
       </p:transition>
     </mc:Choice>
-    <mc:Fallback>
+    <mc:Fallback xmlns="">
       <p:transition spd="slow">
         <p:fade/>
       </p:transition>
@@ -11537,13 +11549,13 @@
   <p:clrMapOvr>
     <a:masterClrMapping/>
   </p:clrMapOvr>
-  <mc:AlternateContent xmlns:mc="http://schemas.openxmlformats.org/markup-compatibility/2006">
-    <mc:Choice xmlns:p14="http://schemas.microsoft.com/office/powerpoint/2010/main" Requires="p14">
+  <mc:AlternateContent xmlns:mc="http://schemas.openxmlformats.org/markup-compatibility/2006" xmlns:p14="http://schemas.microsoft.com/office/powerpoint/2010/main">
+    <mc:Choice Requires="p14">
       <p:transition spd="slow" p14:dur="2000">
         <p14:ferris dir="l"/>
       </p:transition>
     </mc:Choice>
-    <mc:Fallback>
+    <mc:Fallback xmlns="">
       <p:transition spd="slow">
         <p:fade/>
       </p:transition>
@@ -12199,13 +12211,13 @@
   <p:clrMapOvr>
     <a:masterClrMapping/>
   </p:clrMapOvr>
-  <mc:AlternateContent xmlns:mc="http://schemas.openxmlformats.org/markup-compatibility/2006">
-    <mc:Choice xmlns:p14="http://schemas.microsoft.com/office/powerpoint/2010/main" Requires="p14">
+  <mc:AlternateContent xmlns:mc="http://schemas.openxmlformats.org/markup-compatibility/2006" xmlns:p14="http://schemas.microsoft.com/office/powerpoint/2010/main">
+    <mc:Choice Requires="p14">
       <p:transition spd="slow" p14:dur="2000">
         <p14:prism isContent="1"/>
       </p:transition>
     </mc:Choice>
-    <mc:Fallback>
+    <mc:Fallback xmlns="">
       <p:transition spd="slow">
         <p:fade/>
       </p:transition>
@@ -12984,13 +12996,13 @@
   <p:clrMapOvr>
     <a:masterClrMapping/>
   </p:clrMapOvr>
-  <mc:AlternateContent xmlns:mc="http://schemas.openxmlformats.org/markup-compatibility/2006">
-    <mc:Choice xmlns:p15="http://schemas.microsoft.com/office/powerpoint/2012/main" Requires="p15">
+  <mc:AlternateContent xmlns:mc="http://schemas.openxmlformats.org/markup-compatibility/2006" xmlns:p15="http://schemas.microsoft.com/office/powerpoint/2012/main">
+    <mc:Choice Requires="p15">
       <p:transition xmlns:p14="http://schemas.microsoft.com/office/powerpoint/2010/main" spd="slow" p14:dur="1250">
         <p15:prstTrans prst="pageCurlDouble"/>
       </p:transition>
     </mc:Choice>
-    <mc:Fallback>
+    <mc:Fallback xmlns="">
       <p:transition spd="slow">
         <p:fade/>
       </p:transition>
